--- a/data/template.pptx
+++ b/data/template.pptx
@@ -3086,7 +3086,7 @@
     <p:bg>
       <p:bgPr>
         <a:solidFill>
-          <a:srgbClr val="1F3764"/>
+          <a:srgbClr val="1B2A4A"/>
         </a:solidFill>
         <a:effectLst/>
       </p:bgPr>
@@ -3100,14 +3100,229 @@
       <p:grpSpPr/>
       <p:sp>
         <p:nvSpPr>
-          <p:cNvPr id="2" name="TextBox 1"/>
+          <p:cNvPr id="2" name="Rectangle 1"/>
+          <p:cNvSpPr/>
+          <p:nvPr/>
+        </p:nvSpPr>
+        <p:spPr>
+          <a:xfrm>
+            <a:off x="0" y="0"/>
+            <a:ext cx="411480" cy="6858000"/>
+          </a:xfrm>
+          <a:prstGeom prst="rect">
+            <a:avLst/>
+          </a:prstGeom>
+          <a:solidFill>
+            <a:srgbClr val="00B4D8"/>
+          </a:solidFill>
+          <a:ln>
+            <a:noFill/>
+          </a:ln>
+        </p:spPr>
+        <p:style>
+          <a:lnRef idx="1">
+            <a:schemeClr val="accent1"/>
+          </a:lnRef>
+          <a:fillRef idx="3">
+            <a:schemeClr val="accent1"/>
+          </a:fillRef>
+          <a:effectRef idx="2">
+            <a:schemeClr val="accent1"/>
+          </a:effectRef>
+          <a:fontRef idx="minor">
+            <a:schemeClr val="lt1"/>
+          </a:fontRef>
+        </p:style>
+        <p:txBody>
+          <a:bodyPr rtlCol="0" anchor="ctr"/>
+          <a:lstStyle/>
+          <a:p>
+            <a:pPr algn="ctr"/>
+          </a:p>
+        </p:txBody>
+      </p:sp>
+      <p:sp>
+        <p:nvSpPr>
+          <p:cNvPr id="3" name="Rectangle 2"/>
+          <p:cNvSpPr/>
+          <p:nvPr/>
+        </p:nvSpPr>
+        <p:spPr>
+          <a:xfrm>
+            <a:off x="7772400" y="4754880"/>
+            <a:ext cx="4416552" cy="2103120"/>
+          </a:xfrm>
+          <a:prstGeom prst="rect">
+            <a:avLst/>
+          </a:prstGeom>
+          <a:solidFill>
+            <a:srgbClr val="FF6B35"/>
+          </a:solidFill>
+          <a:ln>
+            <a:noFill/>
+          </a:ln>
+        </p:spPr>
+        <p:style>
+          <a:lnRef idx="1">
+            <a:schemeClr val="accent1"/>
+          </a:lnRef>
+          <a:fillRef idx="3">
+            <a:schemeClr val="accent1"/>
+          </a:fillRef>
+          <a:effectRef idx="2">
+            <a:schemeClr val="accent1"/>
+          </a:effectRef>
+          <a:fontRef idx="minor">
+            <a:schemeClr val="lt1"/>
+          </a:fontRef>
+        </p:style>
+        <p:txBody>
+          <a:bodyPr rtlCol="0" anchor="ctr"/>
+          <a:lstStyle/>
+          <a:p>
+            <a:pPr algn="ctr"/>
+          </a:p>
+        </p:txBody>
+      </p:sp>
+      <p:sp>
+        <p:nvSpPr>
+          <p:cNvPr id="4" name="Rectangle 3"/>
+          <p:cNvSpPr/>
+          <p:nvPr/>
+        </p:nvSpPr>
+        <p:spPr>
+          <a:xfrm>
+            <a:off x="8686800" y="5303520"/>
+            <a:ext cx="3502152" cy="1554480"/>
+          </a:xfrm>
+          <a:prstGeom prst="rect">
+            <a:avLst/>
+          </a:prstGeom>
+          <a:solidFill>
+            <a:srgbClr val="1B2A4A"/>
+          </a:solidFill>
+          <a:ln>
+            <a:noFill/>
+          </a:ln>
+        </p:spPr>
+        <p:style>
+          <a:lnRef idx="1">
+            <a:schemeClr val="accent1"/>
+          </a:lnRef>
+          <a:fillRef idx="3">
+            <a:schemeClr val="accent1"/>
+          </a:fillRef>
+          <a:effectRef idx="2">
+            <a:schemeClr val="accent1"/>
+          </a:effectRef>
+          <a:fontRef idx="minor">
+            <a:schemeClr val="lt1"/>
+          </a:fontRef>
+        </p:style>
+        <p:txBody>
+          <a:bodyPr rtlCol="0" anchor="ctr"/>
+          <a:lstStyle/>
+          <a:p>
+            <a:pPr algn="ctr"/>
+          </a:p>
+        </p:txBody>
+      </p:sp>
+      <p:sp>
+        <p:nvSpPr>
+          <p:cNvPr id="5" name="Rectangle 4"/>
+          <p:cNvSpPr/>
+          <p:nvPr/>
+        </p:nvSpPr>
+        <p:spPr>
+          <a:xfrm>
+            <a:off x="411480" y="0"/>
+            <a:ext cx="11777472" cy="73152"/>
+          </a:xfrm>
+          <a:prstGeom prst="rect">
+            <a:avLst/>
+          </a:prstGeom>
+          <a:solidFill>
+            <a:srgbClr val="00B4D8"/>
+          </a:solidFill>
+          <a:ln>
+            <a:noFill/>
+          </a:ln>
+        </p:spPr>
+        <p:style>
+          <a:lnRef idx="1">
+            <a:schemeClr val="accent1"/>
+          </a:lnRef>
+          <a:fillRef idx="3">
+            <a:schemeClr val="accent1"/>
+          </a:fillRef>
+          <a:effectRef idx="2">
+            <a:schemeClr val="accent1"/>
+          </a:effectRef>
+          <a:fontRef idx="minor">
+            <a:schemeClr val="lt1"/>
+          </a:fontRef>
+        </p:style>
+        <p:txBody>
+          <a:bodyPr rtlCol="0" anchor="ctr"/>
+          <a:lstStyle/>
+          <a:p>
+            <a:pPr algn="ctr"/>
+          </a:p>
+        </p:txBody>
+      </p:sp>
+      <p:sp>
+        <p:nvSpPr>
+          <p:cNvPr id="6" name="Rectangle 5"/>
+          <p:cNvSpPr/>
+          <p:nvPr/>
+        </p:nvSpPr>
+        <p:spPr>
+          <a:xfrm>
+            <a:off x="731520" y="3337560"/>
+            <a:ext cx="6858000" cy="45720"/>
+          </a:xfrm>
+          <a:prstGeom prst="rect">
+            <a:avLst/>
+          </a:prstGeom>
+          <a:solidFill>
+            <a:srgbClr val="00B4D8"/>
+          </a:solidFill>
+          <a:ln>
+            <a:noFill/>
+          </a:ln>
+        </p:spPr>
+        <p:style>
+          <a:lnRef idx="1">
+            <a:schemeClr val="accent1"/>
+          </a:lnRef>
+          <a:fillRef idx="3">
+            <a:schemeClr val="accent1"/>
+          </a:fillRef>
+          <a:effectRef idx="2">
+            <a:schemeClr val="accent1"/>
+          </a:effectRef>
+          <a:fontRef idx="minor">
+            <a:schemeClr val="lt1"/>
+          </a:fontRef>
+        </p:style>
+        <p:txBody>
+          <a:bodyPr rtlCol="0" anchor="ctr"/>
+          <a:lstStyle/>
+          <a:p>
+            <a:pPr algn="ctr"/>
+          </a:p>
+        </p:txBody>
+      </p:sp>
+      <p:sp>
+        <p:nvSpPr>
+          <p:cNvPr id="7" name="TextBox 6"/>
           <p:cNvSpPr txBox="1"/>
           <p:nvPr/>
         </p:nvSpPr>
         <p:spPr>
           <a:xfrm>
-            <a:off x="914400" y="2286000"/>
-            <a:ext cx="10058400" cy="1097280"/>
+            <a:off x="731520" y="1737360"/>
+            <a:ext cx="10515600" cy="1280160"/>
           </a:xfrm>
           <a:prstGeom prst="rect">
             <a:avLst/>
@@ -3120,9 +3335,9 @@
           </a:bodyPr>
           <a:lstStyle/>
           <a:p>
-            <a:pPr algn="ctr"/>
-            <a:r>
-              <a:rPr sz="3600" b="1">
+            <a:pPr algn="l"/>
+            <a:r>
+              <a:rPr sz="3800" b="1" i="0">
                 <a:solidFill>
                   <a:srgbClr val="FFFFFF"/>
                 </a:solidFill>
@@ -3134,14 +3349,14 @@
       </p:sp>
       <p:sp>
         <p:nvSpPr>
-          <p:cNvPr id="3" name="TextBox 2"/>
+          <p:cNvPr id="8" name="TextBox 7"/>
           <p:cNvSpPr txBox="1"/>
           <p:nvPr/>
         </p:nvSpPr>
         <p:spPr>
           <a:xfrm>
-            <a:off x="914400" y="3657600"/>
-            <a:ext cx="10058400" cy="548640"/>
+            <a:off x="731520" y="3017520"/>
+            <a:ext cx="8229600" cy="502920"/>
           </a:xfrm>
           <a:prstGeom prst="rect">
             <a:avLst/>
@@ -3154,15 +3369,126 @@
           </a:bodyPr>
           <a:lstStyle/>
           <a:p>
-            <a:pPr algn="ctr"/>
-            <a:r>
-              <a:rPr sz="2000" b="0">
+            <a:pPr algn="l"/>
+            <a:r>
+              <a:rPr sz="1500" b="0" i="1">
                 <a:solidFill>
-                  <a:srgbClr val="CCCCFF"/>
+                  <a:srgbClr val="00B4D8"/>
+                </a:solidFill>
+              </a:rPr>
+              <a:t>Sales Performance Report</a:t>
+            </a:r>
+          </a:p>
+        </p:txBody>
+      </p:sp>
+      <p:sp>
+        <p:nvSpPr>
+          <p:cNvPr id="9" name="TextBox 8"/>
+          <p:cNvSpPr txBox="1"/>
+          <p:nvPr/>
+        </p:nvSpPr>
+        <p:spPr>
+          <a:xfrm>
+            <a:off x="731520" y="3520440"/>
+            <a:ext cx="8229600" cy="457200"/>
+          </a:xfrm>
+          <a:prstGeom prst="rect">
+            <a:avLst/>
+          </a:prstGeom>
+          <a:noFill/>
+        </p:spPr>
+        <p:txBody>
+          <a:bodyPr wrap="square">
+            <a:spAutoFit/>
+          </a:bodyPr>
+          <a:lstStyle/>
+          <a:p>
+            <a:pPr algn="l"/>
+            <a:r>
+              <a:rPr sz="1400" b="0" i="0">
+                <a:solidFill>
+                  <a:srgbClr val="CCD6E0"/>
                 </a:solidFill>
               </a:rPr>
               <a:t>{{report_date}}</a:t>
             </a:r>
+          </a:p>
+        </p:txBody>
+      </p:sp>
+      <p:sp>
+        <p:nvSpPr>
+          <p:cNvPr id="10" name="TextBox 9"/>
+          <p:cNvSpPr txBox="1"/>
+          <p:nvPr/>
+        </p:nvSpPr>
+        <p:spPr>
+          <a:xfrm>
+            <a:off x="8229600" y="6126480"/>
+            <a:ext cx="3657600" cy="457200"/>
+          </a:xfrm>
+          <a:prstGeom prst="rect">
+            <a:avLst/>
+          </a:prstGeom>
+          <a:noFill/>
+        </p:spPr>
+        <p:txBody>
+          <a:bodyPr wrap="square">
+            <a:spAutoFit/>
+          </a:bodyPr>
+          <a:lstStyle/>
+          <a:p>
+            <a:pPr algn="r"/>
+            <a:r>
+              <a:rPr sz="1200" b="0" i="1">
+                <a:solidFill>
+                  <a:srgbClr val="FFFFFF"/>
+                </a:solidFill>
+              </a:rPr>
+              <a:t>ACME Corporation</a:t>
+            </a:r>
+          </a:p>
+        </p:txBody>
+      </p:sp>
+      <p:sp>
+        <p:nvSpPr>
+          <p:cNvPr id="11" name="Rectangle 10"/>
+          <p:cNvSpPr/>
+          <p:nvPr/>
+        </p:nvSpPr>
+        <p:spPr>
+          <a:xfrm>
+            <a:off x="411480" y="6400800"/>
+            <a:ext cx="320040" cy="457200"/>
+          </a:xfrm>
+          <a:prstGeom prst="rect">
+            <a:avLst/>
+          </a:prstGeom>
+          <a:solidFill>
+            <a:srgbClr val="FF6B35"/>
+          </a:solidFill>
+          <a:ln>
+            <a:noFill/>
+          </a:ln>
+        </p:spPr>
+        <p:style>
+          <a:lnRef idx="1">
+            <a:schemeClr val="accent1"/>
+          </a:lnRef>
+          <a:fillRef idx="3">
+            <a:schemeClr val="accent1"/>
+          </a:fillRef>
+          <a:effectRef idx="2">
+            <a:schemeClr val="accent1"/>
+          </a:effectRef>
+          <a:fontRef idx="minor">
+            <a:schemeClr val="lt1"/>
+          </a:fontRef>
+        </p:style>
+        <p:txBody>
+          <a:bodyPr rtlCol="0" anchor="ctr"/>
+          <a:lstStyle/>
+          <a:p>
+            <a:pPr algn="ctr"/>
           </a:p>
         </p:txBody>
       </p:sp>
@@ -3177,6 +3503,14 @@
 <file path=ppt/slides/slide2.xml><?xml version="1.0" encoding="utf-8"?>
 <p:sld xmlns:a="http://schemas.openxmlformats.org/drawingml/2006/main" xmlns:p="http://schemas.openxmlformats.org/presentationml/2006/main" xmlns:r="http://schemas.openxmlformats.org/officeDocument/2006/relationships">
   <p:cSld>
+    <p:bg>
+      <p:bgPr>
+        <a:solidFill>
+          <a:srgbClr val="F0F4F8"/>
+        </a:solidFill>
+        <a:effectLst/>
+      </p:bgPr>
+    </p:bg>
     <p:spTree>
       <p:nvGrpSpPr>
         <p:cNvPr id="1" name=""/>
@@ -3186,14 +3520,100 @@
       <p:grpSpPr/>
       <p:sp>
         <p:nvSpPr>
-          <p:cNvPr id="2" name="TextBox 1"/>
+          <p:cNvPr id="2" name="Rectangle 1"/>
+          <p:cNvSpPr/>
+          <p:nvPr/>
+        </p:nvSpPr>
+        <p:spPr>
+          <a:xfrm>
+            <a:off x="0" y="0"/>
+            <a:ext cx="12188952" cy="1143000"/>
+          </a:xfrm>
+          <a:prstGeom prst="rect">
+            <a:avLst/>
+          </a:prstGeom>
+          <a:solidFill>
+            <a:srgbClr val="1B2A4A"/>
+          </a:solidFill>
+          <a:ln>
+            <a:noFill/>
+          </a:ln>
+        </p:spPr>
+        <p:style>
+          <a:lnRef idx="1">
+            <a:schemeClr val="accent1"/>
+          </a:lnRef>
+          <a:fillRef idx="3">
+            <a:schemeClr val="accent1"/>
+          </a:fillRef>
+          <a:effectRef idx="2">
+            <a:schemeClr val="accent1"/>
+          </a:effectRef>
+          <a:fontRef idx="minor">
+            <a:schemeClr val="lt1"/>
+          </a:fontRef>
+        </p:style>
+        <p:txBody>
+          <a:bodyPr rtlCol="0" anchor="ctr"/>
+          <a:lstStyle/>
+          <a:p>
+            <a:pPr algn="ctr"/>
+          </a:p>
+        </p:txBody>
+      </p:sp>
+      <p:sp>
+        <p:nvSpPr>
+          <p:cNvPr id="3" name="Rectangle 2"/>
+          <p:cNvSpPr/>
+          <p:nvPr/>
+        </p:nvSpPr>
+        <p:spPr>
+          <a:xfrm>
+            <a:off x="0" y="0"/>
+            <a:ext cx="411480" cy="1143000"/>
+          </a:xfrm>
+          <a:prstGeom prst="rect">
+            <a:avLst/>
+          </a:prstGeom>
+          <a:solidFill>
+            <a:srgbClr val="00B4D8"/>
+          </a:solidFill>
+          <a:ln>
+            <a:noFill/>
+          </a:ln>
+        </p:spPr>
+        <p:style>
+          <a:lnRef idx="1">
+            <a:schemeClr val="accent1"/>
+          </a:lnRef>
+          <a:fillRef idx="3">
+            <a:schemeClr val="accent1"/>
+          </a:fillRef>
+          <a:effectRef idx="2">
+            <a:schemeClr val="accent1"/>
+          </a:effectRef>
+          <a:fontRef idx="minor">
+            <a:schemeClr val="lt1"/>
+          </a:fontRef>
+        </p:style>
+        <p:txBody>
+          <a:bodyPr rtlCol="0" anchor="ctr"/>
+          <a:lstStyle/>
+          <a:p>
+            <a:pPr algn="ctr"/>
+          </a:p>
+        </p:txBody>
+      </p:sp>
+      <p:sp>
+        <p:nvSpPr>
+          <p:cNvPr id="4" name="TextBox 3"/>
           <p:cNvSpPr txBox="1"/>
           <p:nvPr/>
         </p:nvSpPr>
         <p:spPr>
           <a:xfrm>
-            <a:off x="457200" y="274320"/>
-            <a:ext cx="10972800" cy="640080"/>
+            <a:off x="594360" y="201168"/>
+            <a:ext cx="7315200" cy="685800"/>
           </a:xfrm>
           <a:prstGeom prst="rect">
             <a:avLst/>
@@ -3208,9 +3628,9 @@
           <a:p>
             <a:pPr algn="l"/>
             <a:r>
-              <a:rPr sz="2800" b="1">
+              <a:rPr sz="2800" b="1" i="0">
                 <a:solidFill>
-                  <a:srgbClr val="1F3764"/>
+                  <a:srgbClr val="FFFFFF"/>
                 </a:solidFill>
               </a:rPr>
               <a:t>売上サマリー</a:t>
@@ -3220,40 +3640,134 @@
       </p:sp>
       <p:sp>
         <p:nvSpPr>
-          <p:cNvPr id="3" name="TextBox 2"/>
+          <p:cNvPr id="5" name="TextBox 4"/>
           <p:cNvSpPr txBox="1"/>
           <p:nvPr/>
         </p:nvSpPr>
         <p:spPr>
           <a:xfrm>
-            <a:off x="457200" y="1005840"/>
-            <a:ext cx="10972800" cy="45720"/>
+            <a:off x="7772400" y="365760"/>
+            <a:ext cx="4114800" cy="457200"/>
+          </a:xfrm>
+          <a:prstGeom prst="rect">
+            <a:avLst/>
+          </a:prstGeom>
+          <a:noFill/>
+        </p:spPr>
+        <p:txBody>
+          <a:bodyPr wrap="square">
+            <a:spAutoFit/>
+          </a:bodyPr>
+          <a:lstStyle/>
+          <a:p>
+            <a:pPr algn="r"/>
+            <a:r>
+              <a:rPr sz="1300" b="0" i="1">
+                <a:solidFill>
+                  <a:srgbClr val="00B4D8"/>
+                </a:solidFill>
+              </a:rPr>
+              <a:t>SALES SUMMARY</a:t>
+            </a:r>
+          </a:p>
+        </p:txBody>
+      </p:sp>
+      <p:sp>
+        <p:nvSpPr>
+          <p:cNvPr id="6" name="Rectangle 5"/>
+          <p:cNvSpPr/>
+          <p:nvPr/>
+        </p:nvSpPr>
+        <p:spPr>
+          <a:xfrm>
+            <a:off x="411480" y="1280160"/>
+            <a:ext cx="11594592" cy="5120640"/>
           </a:xfrm>
           <a:prstGeom prst="rect">
             <a:avLst/>
           </a:prstGeom>
           <a:solidFill>
-            <a:srgbClr val="1F3764"/>
+            <a:srgbClr val="FFFFFF"/>
           </a:solidFill>
-        </p:spPr>
-        <p:txBody>
-          <a:bodyPr wrap="none">
-            <a:spAutoFit/>
-          </a:bodyPr>
-          <a:lstStyle/>
-          <a:p/>
-        </p:txBody>
-      </p:sp>
-      <p:sp>
-        <p:nvSpPr>
-          <p:cNvPr id="4" name="TextBox 3"/>
+          <a:ln>
+            <a:noFill/>
+          </a:ln>
+        </p:spPr>
+        <p:style>
+          <a:lnRef idx="1">
+            <a:schemeClr val="accent1"/>
+          </a:lnRef>
+          <a:fillRef idx="3">
+            <a:schemeClr val="accent1"/>
+          </a:fillRef>
+          <a:effectRef idx="2">
+            <a:schemeClr val="accent1"/>
+          </a:effectRef>
+          <a:fontRef idx="minor">
+            <a:schemeClr val="lt1"/>
+          </a:fontRef>
+        </p:style>
+        <p:txBody>
+          <a:bodyPr rtlCol="0" anchor="ctr"/>
+          <a:lstStyle/>
+          <a:p>
+            <a:pPr algn="ctr"/>
+          </a:p>
+        </p:txBody>
+      </p:sp>
+      <p:sp>
+        <p:nvSpPr>
+          <p:cNvPr id="7" name="Rectangle 6"/>
+          <p:cNvSpPr/>
+          <p:nvPr/>
+        </p:nvSpPr>
+        <p:spPr>
+          <a:xfrm>
+            <a:off x="411480" y="1280160"/>
+            <a:ext cx="64008" cy="5120640"/>
+          </a:xfrm>
+          <a:prstGeom prst="rect">
+            <a:avLst/>
+          </a:prstGeom>
+          <a:solidFill>
+            <a:srgbClr val="00B4D8"/>
+          </a:solidFill>
+          <a:ln>
+            <a:noFill/>
+          </a:ln>
+        </p:spPr>
+        <p:style>
+          <a:lnRef idx="1">
+            <a:schemeClr val="accent1"/>
+          </a:lnRef>
+          <a:fillRef idx="3">
+            <a:schemeClr val="accent1"/>
+          </a:fillRef>
+          <a:effectRef idx="2">
+            <a:schemeClr val="accent1"/>
+          </a:effectRef>
+          <a:fontRef idx="minor">
+            <a:schemeClr val="lt1"/>
+          </a:fontRef>
+        </p:style>
+        <p:txBody>
+          <a:bodyPr rtlCol="0" anchor="ctr"/>
+          <a:lstStyle/>
+          <a:p>
+            <a:pPr algn="ctr"/>
+          </a:p>
+        </p:txBody>
+      </p:sp>
+      <p:sp>
+        <p:nvSpPr>
+          <p:cNvPr id="8" name="TextBox 7"/>
           <p:cNvSpPr txBox="1"/>
           <p:nvPr/>
         </p:nvSpPr>
         <p:spPr>
           <a:xfrm>
-            <a:off x="457200" y="1188720"/>
-            <a:ext cx="10972800" cy="5029200"/>
+            <a:off x="685800" y="1417320"/>
+            <a:ext cx="11155680" cy="4800600"/>
           </a:xfrm>
           <a:prstGeom prst="rect">
             <a:avLst/>
@@ -3268,8 +3782,123 @@
           <a:p>
             <a:pPr algn="l"/>
             <a:r>
-              <a:rPr sz="1600" b="0"/>
+              <a:rPr sz="1500" b="0" i="0">
+                <a:solidFill>
+                  <a:srgbClr val="4A5A6A"/>
+                </a:solidFill>
+              </a:rPr>
               <a:t>{{summary_text}}</a:t>
+            </a:r>
+          </a:p>
+        </p:txBody>
+      </p:sp>
+      <p:sp>
+        <p:nvSpPr>
+          <p:cNvPr id="9" name="Rectangle 8"/>
+          <p:cNvSpPr/>
+          <p:nvPr/>
+        </p:nvSpPr>
+        <p:spPr>
+          <a:xfrm>
+            <a:off x="0" y="6537960"/>
+            <a:ext cx="12188952" cy="320040"/>
+          </a:xfrm>
+          <a:prstGeom prst="rect">
+            <a:avLst/>
+          </a:prstGeom>
+          <a:solidFill>
+            <a:srgbClr val="1B2A4A"/>
+          </a:solidFill>
+          <a:ln>
+            <a:noFill/>
+          </a:ln>
+        </p:spPr>
+        <p:style>
+          <a:lnRef idx="1">
+            <a:schemeClr val="accent1"/>
+          </a:lnRef>
+          <a:fillRef idx="3">
+            <a:schemeClr val="accent1"/>
+          </a:fillRef>
+          <a:effectRef idx="2">
+            <a:schemeClr val="accent1"/>
+          </a:effectRef>
+          <a:fontRef idx="minor">
+            <a:schemeClr val="lt1"/>
+          </a:fontRef>
+        </p:style>
+        <p:txBody>
+          <a:bodyPr rtlCol="0" anchor="ctr"/>
+          <a:lstStyle/>
+          <a:p>
+            <a:pPr algn="ctr"/>
+          </a:p>
+        </p:txBody>
+      </p:sp>
+      <p:sp>
+        <p:nvSpPr>
+          <p:cNvPr id="10" name="TextBox 9"/>
+          <p:cNvSpPr txBox="1"/>
+          <p:nvPr/>
+        </p:nvSpPr>
+        <p:spPr>
+          <a:xfrm>
+            <a:off x="274320" y="6565392"/>
+            <a:ext cx="7315200" cy="274320"/>
+          </a:xfrm>
+          <a:prstGeom prst="rect">
+            <a:avLst/>
+          </a:prstGeom>
+          <a:noFill/>
+        </p:spPr>
+        <p:txBody>
+          <a:bodyPr wrap="square">
+            <a:spAutoFit/>
+          </a:bodyPr>
+          <a:lstStyle/>
+          <a:p>
+            <a:pPr algn="l"/>
+            <a:r>
+              <a:rPr sz="900" b="0" i="0">
+                <a:solidFill>
+                  <a:srgbClr val="CCD6E0"/>
+                </a:solidFill>
+              </a:rPr>
+              <a:t>CONFIDENTIAL  |  ACME Corporation</a:t>
+            </a:r>
+          </a:p>
+        </p:txBody>
+      </p:sp>
+      <p:sp>
+        <p:nvSpPr>
+          <p:cNvPr id="11" name="TextBox 10"/>
+          <p:cNvSpPr txBox="1"/>
+          <p:nvPr/>
+        </p:nvSpPr>
+        <p:spPr>
+          <a:xfrm>
+            <a:off x="11430000" y="6565392"/>
+            <a:ext cx="548640" cy="274320"/>
+          </a:xfrm>
+          <a:prstGeom prst="rect">
+            <a:avLst/>
+          </a:prstGeom>
+          <a:noFill/>
+        </p:spPr>
+        <p:txBody>
+          <a:bodyPr wrap="square">
+            <a:spAutoFit/>
+          </a:bodyPr>
+          <a:lstStyle/>
+          <a:p>
+            <a:pPr algn="r"/>
+            <a:r>
+              <a:rPr sz="900" b="0" i="0">
+                <a:solidFill>
+                  <a:srgbClr val="CCD6E0"/>
+                </a:solidFill>
+              </a:rPr>
+              <a:t>2 / 3</a:t>
             </a:r>
           </a:p>
         </p:txBody>
@@ -3285,6 +3914,14 @@
 <file path=ppt/slides/slide3.xml><?xml version="1.0" encoding="utf-8"?>
 <p:sld xmlns:a="http://schemas.openxmlformats.org/drawingml/2006/main" xmlns:p="http://schemas.openxmlformats.org/presentationml/2006/main" xmlns:r="http://schemas.openxmlformats.org/officeDocument/2006/relationships">
   <p:cSld>
+    <p:bg>
+      <p:bgPr>
+        <a:solidFill>
+          <a:srgbClr val="F0F4F8"/>
+        </a:solidFill>
+        <a:effectLst/>
+      </p:bgPr>
+    </p:bg>
     <p:spTree>
       <p:nvGrpSpPr>
         <p:cNvPr id="1" name=""/>
@@ -3294,14 +3931,100 @@
       <p:grpSpPr/>
       <p:sp>
         <p:nvSpPr>
-          <p:cNvPr id="2" name="TextBox 1"/>
+          <p:cNvPr id="2" name="Rectangle 1"/>
+          <p:cNvSpPr/>
+          <p:nvPr/>
+        </p:nvSpPr>
+        <p:spPr>
+          <a:xfrm>
+            <a:off x="0" y="0"/>
+            <a:ext cx="12188952" cy="1143000"/>
+          </a:xfrm>
+          <a:prstGeom prst="rect">
+            <a:avLst/>
+          </a:prstGeom>
+          <a:solidFill>
+            <a:srgbClr val="1B2A4A"/>
+          </a:solidFill>
+          <a:ln>
+            <a:noFill/>
+          </a:ln>
+        </p:spPr>
+        <p:style>
+          <a:lnRef idx="1">
+            <a:schemeClr val="accent1"/>
+          </a:lnRef>
+          <a:fillRef idx="3">
+            <a:schemeClr val="accent1"/>
+          </a:fillRef>
+          <a:effectRef idx="2">
+            <a:schemeClr val="accent1"/>
+          </a:effectRef>
+          <a:fontRef idx="minor">
+            <a:schemeClr val="lt1"/>
+          </a:fontRef>
+        </p:style>
+        <p:txBody>
+          <a:bodyPr rtlCol="0" anchor="ctr"/>
+          <a:lstStyle/>
+          <a:p>
+            <a:pPr algn="ctr"/>
+          </a:p>
+        </p:txBody>
+      </p:sp>
+      <p:sp>
+        <p:nvSpPr>
+          <p:cNvPr id="3" name="Rectangle 2"/>
+          <p:cNvSpPr/>
+          <p:nvPr/>
+        </p:nvSpPr>
+        <p:spPr>
+          <a:xfrm>
+            <a:off x="0" y="0"/>
+            <a:ext cx="411480" cy="1143000"/>
+          </a:xfrm>
+          <a:prstGeom prst="rect">
+            <a:avLst/>
+          </a:prstGeom>
+          <a:solidFill>
+            <a:srgbClr val="FF6B35"/>
+          </a:solidFill>
+          <a:ln>
+            <a:noFill/>
+          </a:ln>
+        </p:spPr>
+        <p:style>
+          <a:lnRef idx="1">
+            <a:schemeClr val="accent1"/>
+          </a:lnRef>
+          <a:fillRef idx="3">
+            <a:schemeClr val="accent1"/>
+          </a:fillRef>
+          <a:effectRef idx="2">
+            <a:schemeClr val="accent1"/>
+          </a:effectRef>
+          <a:fontRef idx="minor">
+            <a:schemeClr val="lt1"/>
+          </a:fontRef>
+        </p:style>
+        <p:txBody>
+          <a:bodyPr rtlCol="0" anchor="ctr"/>
+          <a:lstStyle/>
+          <a:p>
+            <a:pPr algn="ctr"/>
+          </a:p>
+        </p:txBody>
+      </p:sp>
+      <p:sp>
+        <p:nvSpPr>
+          <p:cNvPr id="4" name="TextBox 3"/>
           <p:cNvSpPr txBox="1"/>
           <p:nvPr/>
         </p:nvSpPr>
         <p:spPr>
           <a:xfrm>
-            <a:off x="457200" y="274320"/>
-            <a:ext cx="10972800" cy="640080"/>
+            <a:off x="594360" y="201168"/>
+            <a:ext cx="7315200" cy="685800"/>
           </a:xfrm>
           <a:prstGeom prst="rect">
             <a:avLst/>
@@ -3316,9 +4039,9 @@
           <a:p>
             <a:pPr algn="l"/>
             <a:r>
-              <a:rPr sz="2800" b="1">
+              <a:rPr sz="2800" b="1" i="0">
                 <a:solidFill>
-                  <a:srgbClr val="1F3764"/>
+                  <a:srgbClr val="FFFFFF"/>
                 </a:solidFill>
               </a:rPr>
               <a:t>所見・次月の方針</a:t>
@@ -3328,40 +4051,134 @@
       </p:sp>
       <p:sp>
         <p:nvSpPr>
-          <p:cNvPr id="3" name="TextBox 2"/>
+          <p:cNvPr id="5" name="TextBox 4"/>
           <p:cNvSpPr txBox="1"/>
           <p:nvPr/>
         </p:nvSpPr>
         <p:spPr>
           <a:xfrm>
-            <a:off x="457200" y="1005840"/>
-            <a:ext cx="10972800" cy="45720"/>
+            <a:off x="6858000" y="365760"/>
+            <a:ext cx="5029200" cy="457200"/>
+          </a:xfrm>
+          <a:prstGeom prst="rect">
+            <a:avLst/>
+          </a:prstGeom>
+          <a:noFill/>
+        </p:spPr>
+        <p:txBody>
+          <a:bodyPr wrap="square">
+            <a:spAutoFit/>
+          </a:bodyPr>
+          <a:lstStyle/>
+          <a:p>
+            <a:pPr algn="r"/>
+            <a:r>
+              <a:rPr sz="1300" b="0" i="1">
+                <a:solidFill>
+                  <a:srgbClr val="FF6B35"/>
+                </a:solidFill>
+              </a:rPr>
+              <a:t>INSIGHTS &amp; NEXT ACTIONS</a:t>
+            </a:r>
+          </a:p>
+        </p:txBody>
+      </p:sp>
+      <p:sp>
+        <p:nvSpPr>
+          <p:cNvPr id="6" name="Rectangle 5"/>
+          <p:cNvSpPr/>
+          <p:nvPr/>
+        </p:nvSpPr>
+        <p:spPr>
+          <a:xfrm>
+            <a:off x="411480" y="1280160"/>
+            <a:ext cx="11594592" cy="5120640"/>
           </a:xfrm>
           <a:prstGeom prst="rect">
             <a:avLst/>
           </a:prstGeom>
           <a:solidFill>
-            <a:srgbClr val="1F3764"/>
+            <a:srgbClr val="FFFFFF"/>
           </a:solidFill>
-        </p:spPr>
-        <p:txBody>
-          <a:bodyPr wrap="none">
-            <a:spAutoFit/>
-          </a:bodyPr>
-          <a:lstStyle/>
-          <a:p/>
-        </p:txBody>
-      </p:sp>
-      <p:sp>
-        <p:nvSpPr>
-          <p:cNvPr id="4" name="TextBox 3"/>
+          <a:ln>
+            <a:noFill/>
+          </a:ln>
+        </p:spPr>
+        <p:style>
+          <a:lnRef idx="1">
+            <a:schemeClr val="accent1"/>
+          </a:lnRef>
+          <a:fillRef idx="3">
+            <a:schemeClr val="accent1"/>
+          </a:fillRef>
+          <a:effectRef idx="2">
+            <a:schemeClr val="accent1"/>
+          </a:effectRef>
+          <a:fontRef idx="minor">
+            <a:schemeClr val="lt1"/>
+          </a:fontRef>
+        </p:style>
+        <p:txBody>
+          <a:bodyPr rtlCol="0" anchor="ctr"/>
+          <a:lstStyle/>
+          <a:p>
+            <a:pPr algn="ctr"/>
+          </a:p>
+        </p:txBody>
+      </p:sp>
+      <p:sp>
+        <p:nvSpPr>
+          <p:cNvPr id="7" name="Rectangle 6"/>
+          <p:cNvSpPr/>
+          <p:nvPr/>
+        </p:nvSpPr>
+        <p:spPr>
+          <a:xfrm>
+            <a:off x="411480" y="1280160"/>
+            <a:ext cx="64008" cy="5120640"/>
+          </a:xfrm>
+          <a:prstGeom prst="rect">
+            <a:avLst/>
+          </a:prstGeom>
+          <a:solidFill>
+            <a:srgbClr val="FF6B35"/>
+          </a:solidFill>
+          <a:ln>
+            <a:noFill/>
+          </a:ln>
+        </p:spPr>
+        <p:style>
+          <a:lnRef idx="1">
+            <a:schemeClr val="accent1"/>
+          </a:lnRef>
+          <a:fillRef idx="3">
+            <a:schemeClr val="accent1"/>
+          </a:fillRef>
+          <a:effectRef idx="2">
+            <a:schemeClr val="accent1"/>
+          </a:effectRef>
+          <a:fontRef idx="minor">
+            <a:schemeClr val="lt1"/>
+          </a:fontRef>
+        </p:style>
+        <p:txBody>
+          <a:bodyPr rtlCol="0" anchor="ctr"/>
+          <a:lstStyle/>
+          <a:p>
+            <a:pPr algn="ctr"/>
+          </a:p>
+        </p:txBody>
+      </p:sp>
+      <p:sp>
+        <p:nvSpPr>
+          <p:cNvPr id="8" name="TextBox 7"/>
           <p:cNvSpPr txBox="1"/>
           <p:nvPr/>
         </p:nvSpPr>
         <p:spPr>
           <a:xfrm>
-            <a:off x="457200" y="1188720"/>
-            <a:ext cx="10972800" cy="5029200"/>
+            <a:off x="685800" y="1417320"/>
+            <a:ext cx="11155680" cy="4800600"/>
           </a:xfrm>
           <a:prstGeom prst="rect">
             <a:avLst/>
@@ -3376,8 +4193,123 @@
           <a:p>
             <a:pPr algn="l"/>
             <a:r>
-              <a:rPr sz="1600" b="0"/>
+              <a:rPr sz="1500" b="0" i="0">
+                <a:solidFill>
+                  <a:srgbClr val="4A5A6A"/>
+                </a:solidFill>
+              </a:rPr>
               <a:t>{{analysis_text}}</a:t>
+            </a:r>
+          </a:p>
+        </p:txBody>
+      </p:sp>
+      <p:sp>
+        <p:nvSpPr>
+          <p:cNvPr id="9" name="Rectangle 8"/>
+          <p:cNvSpPr/>
+          <p:nvPr/>
+        </p:nvSpPr>
+        <p:spPr>
+          <a:xfrm>
+            <a:off x="0" y="6537960"/>
+            <a:ext cx="12188952" cy="320040"/>
+          </a:xfrm>
+          <a:prstGeom prst="rect">
+            <a:avLst/>
+          </a:prstGeom>
+          <a:solidFill>
+            <a:srgbClr val="1B2A4A"/>
+          </a:solidFill>
+          <a:ln>
+            <a:noFill/>
+          </a:ln>
+        </p:spPr>
+        <p:style>
+          <a:lnRef idx="1">
+            <a:schemeClr val="accent1"/>
+          </a:lnRef>
+          <a:fillRef idx="3">
+            <a:schemeClr val="accent1"/>
+          </a:fillRef>
+          <a:effectRef idx="2">
+            <a:schemeClr val="accent1"/>
+          </a:effectRef>
+          <a:fontRef idx="minor">
+            <a:schemeClr val="lt1"/>
+          </a:fontRef>
+        </p:style>
+        <p:txBody>
+          <a:bodyPr rtlCol="0" anchor="ctr"/>
+          <a:lstStyle/>
+          <a:p>
+            <a:pPr algn="ctr"/>
+          </a:p>
+        </p:txBody>
+      </p:sp>
+      <p:sp>
+        <p:nvSpPr>
+          <p:cNvPr id="10" name="TextBox 9"/>
+          <p:cNvSpPr txBox="1"/>
+          <p:nvPr/>
+        </p:nvSpPr>
+        <p:spPr>
+          <a:xfrm>
+            <a:off x="274320" y="6565392"/>
+            <a:ext cx="7315200" cy="274320"/>
+          </a:xfrm>
+          <a:prstGeom prst="rect">
+            <a:avLst/>
+          </a:prstGeom>
+          <a:noFill/>
+        </p:spPr>
+        <p:txBody>
+          <a:bodyPr wrap="square">
+            <a:spAutoFit/>
+          </a:bodyPr>
+          <a:lstStyle/>
+          <a:p>
+            <a:pPr algn="l"/>
+            <a:r>
+              <a:rPr sz="900" b="0" i="0">
+                <a:solidFill>
+                  <a:srgbClr val="CCD6E0"/>
+                </a:solidFill>
+              </a:rPr>
+              <a:t>CONFIDENTIAL  |  ACME Corporation</a:t>
+            </a:r>
+          </a:p>
+        </p:txBody>
+      </p:sp>
+      <p:sp>
+        <p:nvSpPr>
+          <p:cNvPr id="11" name="TextBox 10"/>
+          <p:cNvSpPr txBox="1"/>
+          <p:nvPr/>
+        </p:nvSpPr>
+        <p:spPr>
+          <a:xfrm>
+            <a:off x="11430000" y="6565392"/>
+            <a:ext cx="548640" cy="274320"/>
+          </a:xfrm>
+          <a:prstGeom prst="rect">
+            <a:avLst/>
+          </a:prstGeom>
+          <a:noFill/>
+        </p:spPr>
+        <p:txBody>
+          <a:bodyPr wrap="square">
+            <a:spAutoFit/>
+          </a:bodyPr>
+          <a:lstStyle/>
+          <a:p>
+            <a:pPr algn="r"/>
+            <a:r>
+              <a:rPr sz="900" b="0" i="0">
+                <a:solidFill>
+                  <a:srgbClr val="CCD6E0"/>
+                </a:solidFill>
+              </a:rPr>
+              <a:t>3 / 3</a:t>
             </a:r>
           </a:p>
         </p:txBody>
